--- a/management-seminars/week10_communicating_findings.pptx
+++ b/management-seminars/week10_communicating_findings.pptx
@@ -576,7 +576,7 @@
           <a:lstStyle/>
           <a:p>
             <a:r>
-              <a:t>An insight is a shift in how someone sees the problem, so it implies change, and change needs persuasion. Exploratory charts help you find things; explanatory charts help others see the one thing that matters. Every estimate has uncertainty that the audience needs in plain terms.</a:t>
+              <a:t>A finding becomes useful when the audience understands what it means for them and what to do next. The charts an analyst uses to search the data are rarely the right ones to present; a presentation chart should make one point obvious. Every estimate has uncertainty that the audience needs in plain terms.</a:t>
             </a:r>
           </a:p>
         </p:txBody>
@@ -1702,7 +1702,7 @@
                   <a:srgbClr val="FFFFFF"/>
                 </a:solidFill>
               </a:rPr>
-              <a:t>Data, narrative and visuals work together</a:t>
+              <a:t>Message: what the audience should know or do</a:t>
             </a:r>
             <a:endParaRPr lang="en-US" sz="2400" dirty="0"/>
           </a:p>
@@ -1720,7 +1720,7 @@
                   <a:srgbClr val="FFFFFF"/>
                 </a:solidFill>
               </a:rPr>
-              <a:t>Explanatory charts vs. exploratory charts</a:t>
+              <a:t>Charts for finding things vs. charts for showing them</a:t>
             </a:r>
             <a:endParaRPr lang="en-US" sz="2400" dirty="0"/>
           </a:p>

--- a/management-seminars/week10_communicating_findings.pptx
+++ b/management-seminars/week10_communicating_findings.pptx
@@ -11,6 +11,7 @@
     <p:sldId id="269" r:id="rId20"/>
     <p:sldId id="270" r:id="rId21"/>
     <p:sldId id="271" r:id="rId22"/>
+    <p:sldId id="272" r:id="rId11"/>
   </p:sldIdLst>
   <p:notesMasterIdLst>
     <p:notesMasterId r:id="rId12"/>
@@ -857,6 +858,76 @@
           <a:p>
             <a:r>
               <a:t>Halving a risk from 2% to 1% and from 40% to 20% are very different decisions. A CFO, a medical director and an analyst need different levels of detail from the same work.</a:t>
+            </a:r>
+          </a:p>
+        </p:txBody>
+      </p:sp>
+      <p:sp>
+        <p:nvSpPr>
+          <p:cNvPr id="4" name="Slide Number Placeholder 3"/>
+          <p:cNvSpPr>
+            <a:spLocks noGrp="1"/>
+          </p:cNvSpPr>
+          <p:nvPr>
+            <p:ph type="sldNum" idx="5" sz="quarter"/>
+          </p:nvPr>
+        </p:nvSpPr>
+        <p:spPr/>
+      </p:sp>
+    </p:spTree>
+  </p:cSld>
+  <p:clrMapOvr>
+    <a:masterClrMapping/>
+  </p:clrMapOvr>
+</p:notes>
+</file>
+
+<file path=ppt/notesSlides/notesSlide7.xml><?xml version="1.0" encoding="utf-8"?>
+<p:notes xmlns:a="http://schemas.openxmlformats.org/drawingml/2006/main" xmlns:p="http://schemas.openxmlformats.org/presentationml/2006/main" xmlns:r="http://schemas.openxmlformats.org/officeDocument/2006/relationships">
+  <p:cSld>
+    <p:spTree>
+      <p:nvGrpSpPr>
+        <p:cNvPr id="1" name=""/>
+        <p:cNvGrpSpPr/>
+        <p:nvPr/>
+      </p:nvGrpSpPr>
+      <p:grpSpPr>
+        <a:xfrm>
+          <a:off x="0" y="0"/>
+          <a:ext cx="0" cy="0"/>
+          <a:chOff x="0" y="0"/>
+          <a:chExt cx="0" cy="0"/>
+        </a:xfrm>
+      </p:grpSpPr>
+      <p:sp>
+        <p:nvSpPr>
+          <p:cNvPr id="2" name="Slide Image Placeholder 1"/>
+          <p:cNvSpPr>
+            <a:spLocks noGrp="1"/>
+          </p:cNvSpPr>
+          <p:nvPr>
+            <p:ph type="sldImg" idx="2"/>
+          </p:nvPr>
+        </p:nvSpPr>
+        <p:spPr/>
+      </p:sp>
+      <p:sp>
+        <p:nvSpPr>
+          <p:cNvPr id="3" name="Notes Placeholder 2"/>
+          <p:cNvSpPr>
+            <a:spLocks noGrp="1"/>
+          </p:cNvSpPr>
+          <p:nvPr>
+            <p:ph type="body" idx="3" sz="quarter"/>
+          </p:nvPr>
+        </p:nvSpPr>
+        <p:spPr/>
+        <p:txBody>
+          <a:bodyPr/>
+          <a:lstStyle/>
+          <a:p>
+            <a:r>
+              <a:t>Give students a few minutes to write an answer drawn from their own experience and career, then ask two or three to share. Connect their examples back to this seminar's content. In an online section, post the same question to the discussion board.</a:t>
             </a:r>
           </a:p>
         </p:txBody>
@@ -1506,7 +1577,7 @@
 </p:sldMaster>
 </file>
 
-<file path=ppt/slides/slide11.xml><?xml version="1.0" encoding="utf-8"?>
+<file path=ppt/slides/slide1.xml><?xml version="1.0" encoding="utf-8"?>
 <p:sld xmlns:a="http://schemas.openxmlformats.org/drawingml/2006/main" xmlns:p="http://schemas.openxmlformats.org/presentationml/2006/main" xmlns:r="http://schemas.openxmlformats.org/officeDocument/2006/relationships">
   <p:cSld>
     <p:spTree>
@@ -1600,7 +1671,7 @@
 </p:sld>
 </file>
 
-<file path=ppt/slides/slide12.xml><?xml version="1.0" encoding="utf-8"?>
+<file path=ppt/slides/slide2.xml><?xml version="1.0" encoding="utf-8"?>
 <p:sld xmlns:a="http://schemas.openxmlformats.org/drawingml/2006/main" xmlns:p="http://schemas.openxmlformats.org/presentationml/2006/main" xmlns:r="http://schemas.openxmlformats.org/officeDocument/2006/relationships">
   <p:cSld>
     <p:spTree>
@@ -1797,7 +1868,7 @@
 </p:sld>
 </file>
 
-<file path=ppt/slides/slide13.xml><?xml version="1.0" encoding="utf-8"?>
+<file path=ppt/slides/slide3.xml><?xml version="1.0" encoding="utf-8"?>
 <p:sld xmlns:a="http://schemas.openxmlformats.org/drawingml/2006/main" xmlns:p="http://schemas.openxmlformats.org/presentationml/2006/main" xmlns:r="http://schemas.openxmlformats.org/officeDocument/2006/relationships">
   <p:cSld>
     <p:spTree>
@@ -1994,7 +2065,7 @@
 </p:sld>
 </file>
 
-<file path=ppt/slides/slide14.xml><?xml version="1.0" encoding="utf-8"?>
+<file path=ppt/slides/slide4.xml><?xml version="1.0" encoding="utf-8"?>
 <p:sld xmlns:a="http://schemas.openxmlformats.org/drawingml/2006/main" xmlns:p="http://schemas.openxmlformats.org/presentationml/2006/main" xmlns:r="http://schemas.openxmlformats.org/officeDocument/2006/relationships">
   <p:cSld>
     <p:spTree>
@@ -2191,7 +2262,7 @@
 </p:sld>
 </file>
 
-<file path=ppt/slides/slide15.xml><?xml version="1.0" encoding="utf-8"?>
+<file path=ppt/slides/slide5.xml><?xml version="1.0" encoding="utf-8"?>
 <p:sld xmlns:a="http://schemas.openxmlformats.org/drawingml/2006/main" xmlns:p="http://schemas.openxmlformats.org/presentationml/2006/main" xmlns:r="http://schemas.openxmlformats.org/officeDocument/2006/relationships">
   <p:cSld>
     <p:spTree>
@@ -2370,7 +2441,7 @@
 </p:sld>
 </file>
 
-<file path=ppt/slides/slide16.xml><?xml version="1.0" encoding="utf-8"?>
+<file path=ppt/slides/slide6.xml><?xml version="1.0" encoding="utf-8"?>
 <p:sld xmlns:a="http://schemas.openxmlformats.org/drawingml/2006/main" xmlns:p="http://schemas.openxmlformats.org/presentationml/2006/main" xmlns:r="http://schemas.openxmlformats.org/officeDocument/2006/relationships">
   <p:cSld>
     <p:spTree>
@@ -2536,6 +2607,167 @@
             <a:fld id="{F7021451-1387-4CA6-816F-3879F97B5CBC}" type="slidenum">
               <a:rPr b="0" lang="en-US"/>
               <a:t>6</a:t>
+            </a:fld>
+            <a:endParaRPr lang="en-US"/>
+          </a:p>
+        </p:txBody>
+      </p:sp>
+    </p:spTree>
+  </p:cSld>
+  <p:clrMapOvr>
+    <a:masterClrMapping/>
+  </p:clrMapOvr>
+</p:sld>
+</file>
+
+<file path=ppt/slides/slide7.xml><?xml version="1.0" encoding="utf-8"?>
+<p:sld xmlns:a="http://schemas.openxmlformats.org/drawingml/2006/main" xmlns:p="http://schemas.openxmlformats.org/presentationml/2006/main" xmlns:r="http://schemas.openxmlformats.org/officeDocument/2006/relationships">
+  <p:cSld>
+    <p:spTree>
+      <p:nvGrpSpPr>
+        <p:cNvPr id="1" name=""/>
+        <p:cNvGrpSpPr/>
+        <p:nvPr/>
+      </p:nvGrpSpPr>
+      <p:grpSpPr/>
+      <p:sp>
+        <p:nvSpPr>
+          <p:cNvPr id="2" name="Text 0"/>
+          <p:cNvSpPr/>
+          <p:nvPr>
+            <p:ph idx="100" type="title" hasCustomPrompt="1"/>
+          </p:nvPr>
+        </p:nvSpPr>
+        <p:spPr>
+          <a:xfrm>
+            <a:off x="731520" y="457200"/>
+            <a:ext cx="10698480" cy="822960"/>
+          </a:xfrm>
+          <a:prstGeom prst="rect">
+            <a:avLst/>
+          </a:prstGeom>
+          <a:noFill/>
+          <a:ln/>
+        </p:spPr>
+        <p:txBody>
+          <a:bodyPr wrap="square" lIns="0" tIns="0" rIns="0" bIns="0" rtlCol="0" anchor="t"/>
+          <a:lstStyle/>
+          <a:p>
+            <a:pPr algn="l" indent="0" marL="0">
+              <a:buNone/>
+            </a:pPr>
+            <a:r>
+              <a:rPr lang="en-US" sz="3200" b="1" dirty="0">
+                <a:solidFill>
+                  <a:srgbClr val="FFFFFF"/>
+                </a:solidFill>
+              </a:rPr>
+              <a:t>Discussion</a:t>
+            </a:r>
+            <a:endParaRPr lang="en-US" sz="3200" dirty="0"/>
+          </a:p>
+        </p:txBody>
+      </p:sp>
+      <p:sp>
+        <p:nvSpPr>
+          <p:cNvPr id="3" name="Text 0"/>
+          <p:cNvSpPr/>
+          <p:nvPr>
+            <p:ph idx="101" type="body" hasCustomPrompt="1"/>
+          </p:nvPr>
+        </p:nvSpPr>
+        <p:spPr>
+          <a:xfrm>
+            <a:off x="731520" y="1554480"/>
+            <a:ext cx="10698480" cy="4754880"/>
+          </a:xfrm>
+          <a:prstGeom prst="rect">
+            <a:avLst/>
+          </a:prstGeom>
+          <a:noFill/>
+          <a:ln/>
+        </p:spPr>
+        <p:txBody>
+          <a:bodyPr wrap="square" rtlCol="0" anchor="t"/>
+          <a:lstStyle/>
+          <a:p>
+            <a:pPr algn="l" marL="342900" indent="-342900">
+              <a:spcAft>
+                <a:spcPts val="1000"/>
+              </a:spcAft>
+              <a:buSzPct val="100000"/>
+              <a:buChar char="•"/>
+            </a:pPr>
+            <a:r>
+              <a:rPr lang="en-US" sz="2400" dirty="0">
+                <a:solidFill>
+                  <a:srgbClr val="FFFFFF"/>
+                </a:solidFill>
+              </a:rPr>
+              <a:t>Choose a finding from your work that a busy leader needs to hear. How would you state it in one sentence, with the action you recommend?</a:t>
+            </a:r>
+            <a:endParaRPr lang="en-US" sz="2400" dirty="0"/>
+          </a:p>
+          <a:p>
+            <a:pPr algn="l" marL="342900" indent="-342900">
+              <a:spcAft>
+                <a:spcPts val="1000"/>
+              </a:spcAft>
+              <a:buSzPct val="100000"/>
+              <a:buChar char="•"/>
+            </a:pPr>
+            <a:r>
+              <a:rPr lang="en-US" sz="2400" dirty="0">
+                <a:solidFill>
+                  <a:srgbClr val="FFFFFF"/>
+                </a:solidFill>
+              </a:rPr>
+              <a:t>Draw on your own experience and career, and apply today's seminar to that setting.</a:t>
+            </a:r>
+            <a:endParaRPr lang="en-US" sz="2400" dirty="0"/>
+          </a:p>
+        </p:txBody>
+      </p:sp>
+      <p:sp>
+        <p:nvSpPr>
+          <p:cNvPr id="25" name="Slide Number Placeholder 0"/>
+          <p:cNvSpPr>
+            <a:spLocks noGrp="1"/>
+          </p:cNvSpPr>
+          <p:nvPr>
+            <p:ph type="sldNum" sz="quarter" idx="4294967295"/>
+          </p:nvPr>
+        </p:nvSpPr>
+        <p:spPr>
+          <a:xfrm>
+            <a:off x="10972800" y="6400800"/>
+            <a:ext cx="548640" cy="274320"/>
+          </a:xfrm>
+          <a:prstGeom prst="rect">
+            <a:avLst/>
+          </a:prstGeom>
+          <a:extLst>
+            <a:ext uri="{C572A759-6A51-4108-AA02-DFA0A04FC94B}">
+              <ma14:wrappingTextBoxFlag xmlns:ma14="http://schemas.microsoft.com/office/mac/drawingml/2011/main" val="0"/>
+            </a:ext>
+          </a:extLst>
+        </p:spPr>
+        <p:txBody>
+          <a:bodyPr/>
+          <a:lstStyle>
+            <a:lvl1pPr>
+              <a:defRPr sz="1000">
+                <a:solidFill>
+                  <a:srgbClr val="BFBFBF"/>
+                </a:solidFill>
+              </a:defRPr>
+            </a:lvl1pPr>
+          </a:lstStyle>
+          <a:p>
+            <a:pPr algn="r"/>
+            <a:fld id="{F7021451-1387-4CA6-816F-3879F97B5CBC}" type="slidenum">
+              <a:rPr b="0" lang="en-US"/>
+              <a:t>7</a:t>
             </a:fld>
             <a:endParaRPr lang="en-US"/>
           </a:p>

--- a/management-seminars/week10_communicating_findings.pptx
+++ b/management-seminars/week10_communicating_findings.pptx
@@ -1619,7 +1619,7 @@
                   <a:srgbClr val="FFFFFF"/>
                 </a:solidFill>
               </a:rPr>
-              <a:t>Communicating Complex Findings</a:t>
+              <a:t>Week 10: Communicating Complex Findings</a:t>
             </a:r>
             <a:endParaRPr lang="en-US" sz="4000" dirty="0"/>
           </a:p>
